--- a/阶段性结论/EEF更新 0513.pptx
+++ b/阶段性结论/EEF更新 0513.pptx
@@ -229,7 +229,7 @@
               <a:rPr lang="en-US" smtClean="0">
                 <a:latin typeface="Anova Light" panose="020B0403020203020204" pitchFamily="34" charset="0"/>
               </a:rPr>
-              <a:t>5/12/2025</a:t>
+              <a:t>5/13/2025</a:t>
             </a:fld>
             <a:endParaRPr lang="en-US" dirty="0">
               <a:latin typeface="Anova Light" panose="020B0403020203020204" pitchFamily="34" charset="0"/>
@@ -344,7 +344,7 @@
           <a:p>
             <a:fld id="{D46682E9-A1D3-F04F-A14F-ABAA4D2618F2}" type="datetimeFigureOut">
               <a:rPr lang="en-US" smtClean="0"/>
-              <a:t>5/12/2025</a:t>
+              <a:t>5/13/2025</a:t>
             </a:fld>
             <a:endParaRPr lang="en-US" dirty="0"/>
           </a:p>
